--- a/docs/VR-Fire-Safety-Implementation.pptx
+++ b/docs/VR-Fire-Safety-Implementation.pptx
@@ -23,6 +23,7 @@
     <p:sldId id="271" r:id="rId23"/>
     <p:sldId id="272" r:id="rId24"/>
     <p:sldId id="273" r:id="rId25"/>
+    <p:sldId id="274" r:id="rId26"/>
   </p:sldIdLst>
   <p:sldSz cx="12191695" cy="6858000" type="screen4x3"/>
   <p:notesSz cx="6858000" cy="9144000"/>
@@ -1150,6 +1151,76 @@
           <a:p>
             <a:r>
               <a:t>Close with the run instructions and an honest test statement. The deck does not claim any VR run was performed.</a:t>
+            </a:r>
+          </a:p>
+        </p:txBody>
+      </p:sp>
+      <p:sp>
+        <p:nvSpPr>
+          <p:cNvPr id="4" name="Slide Number Placeholder 3"/>
+          <p:cNvSpPr>
+            <a:spLocks noGrp="1"/>
+          </p:cNvSpPr>
+          <p:nvPr>
+            <p:ph type="sldNum" idx="5" sz="quarter"/>
+          </p:nvPr>
+        </p:nvSpPr>
+        <p:spPr/>
+      </p:sp>
+    </p:spTree>
+  </p:cSld>
+  <p:clrMapOvr>
+    <a:masterClrMapping/>
+  </p:clrMapOvr>
+</p:notes>
+</file>
+
+<file path=ppt/notesSlides/notesSlide19.xml><?xml version="1.0" encoding="utf-8"?>
+<p:notes xmlns:a="http://schemas.openxmlformats.org/drawingml/2006/main" xmlns:p="http://schemas.openxmlformats.org/presentationml/2006/main" xmlns:r="http://schemas.openxmlformats.org/officeDocument/2006/relationships">
+  <p:cSld>
+    <p:spTree>
+      <p:nvGrpSpPr>
+        <p:cNvPr id="1" name=""/>
+        <p:cNvGrpSpPr/>
+        <p:nvPr/>
+      </p:nvGrpSpPr>
+      <p:grpSpPr>
+        <a:xfrm>
+          <a:off x="0" y="0"/>
+          <a:ext cx="0" cy="0"/>
+          <a:chOff x="0" y="0"/>
+          <a:chExt cx="0" cy="0"/>
+        </a:xfrm>
+      </p:grpSpPr>
+      <p:sp>
+        <p:nvSpPr>
+          <p:cNvPr id="2" name="Slide Image Placeholder 1"/>
+          <p:cNvSpPr>
+            <a:spLocks noGrp="1"/>
+          </p:cNvSpPr>
+          <p:nvPr>
+            <p:ph type="sldImg" idx="2"/>
+          </p:nvPr>
+        </p:nvSpPr>
+        <p:spPr/>
+      </p:sp>
+      <p:sp>
+        <p:nvSpPr>
+          <p:cNvPr id="3" name="Notes Placeholder 2"/>
+          <p:cNvSpPr>
+            <a:spLocks noGrp="1"/>
+          </p:cNvSpPr>
+          <p:nvPr>
+            <p:ph type="body" idx="3" sz="quarter"/>
+          </p:nvPr>
+        </p:nvSpPr>
+        <p:spPr/>
+        <p:txBody>
+          <a:bodyPr/>
+          <a:lstStyle/>
+          <a:p>
+            <a:r>
+              <a:t>Six artefacts, five of which can be produced in a few minutes without hardware. The sixth is the wording: stating exactly what was and was not tested is what makes the rest credible. Full walkthrough: docs/VR-Readiness-Evidence.md.</a:t>
             </a:r>
           </a:p>
         </p:txBody>
@@ -19086,6 +19157,1920 @@
                 <a:latin typeface="Segoe UI"/>
               </a:rPr>
               <a:t>Manual step: enable OpenXR, then import the device simulator for headset preview.</a:t>
+            </a:r>
+          </a:p>
+        </p:txBody>
+      </p:sp>
+    </p:spTree>
+  </p:cSld>
+  <p:clrMapOvr>
+    <a:masterClrMapping/>
+  </p:clrMapOvr>
+</p:sld>
+</file>
+
+<file path=ppt/slides/slide19.xml><?xml version="1.0" encoding="utf-8"?>
+<p:sld xmlns:a="http://schemas.openxmlformats.org/drawingml/2006/main" xmlns:p="http://schemas.openxmlformats.org/presentationml/2006/main" xmlns:r="http://schemas.openxmlformats.org/officeDocument/2006/relationships">
+  <p:cSld>
+    <p:spTree>
+      <p:nvGrpSpPr>
+        <p:cNvPr id="1" name=""/>
+        <p:cNvGrpSpPr/>
+        <p:nvPr/>
+      </p:nvGrpSpPr>
+      <p:grpSpPr/>
+      <p:sp>
+        <p:nvSpPr>
+          <p:cNvPr id="2" name="Rectangle 1"/>
+          <p:cNvSpPr/>
+          <p:nvPr/>
+        </p:nvSpPr>
+        <p:spPr>
+          <a:xfrm>
+            <a:off x="0" y="0"/>
+            <a:ext cx="12191695" cy="6858000"/>
+          </a:xfrm>
+          <a:prstGeom prst="rect">
+            <a:avLst/>
+          </a:prstGeom>
+          <a:solidFill>
+            <a:srgbClr val="0E151E"/>
+          </a:solidFill>
+          <a:ln>
+            <a:noFill/>
+          </a:ln>
+          <a:effectLst/>
+        </p:spPr>
+        <p:style>
+          <a:lnRef idx="1">
+            <a:schemeClr val="accent1"/>
+          </a:lnRef>
+          <a:fillRef idx="3">
+            <a:schemeClr val="accent1"/>
+          </a:fillRef>
+          <a:effectRef idx="2">
+            <a:schemeClr val="accent1"/>
+          </a:effectRef>
+          <a:fontRef idx="minor">
+            <a:schemeClr val="lt1"/>
+          </a:fontRef>
+        </p:style>
+        <p:txBody>
+          <a:bodyPr rtlCol="0" anchor="ctr"/>
+          <a:lstStyle/>
+          <a:p>
+            <a:pPr algn="ctr"/>
+          </a:p>
+        </p:txBody>
+      </p:sp>
+      <p:sp>
+        <p:nvSpPr>
+          <p:cNvPr id="3" name="Rectangle 2"/>
+          <p:cNvSpPr/>
+          <p:nvPr/>
+        </p:nvSpPr>
+        <p:spPr>
+          <a:xfrm>
+            <a:off x="640080" y="475488"/>
+            <a:ext cx="82296" cy="237744"/>
+          </a:xfrm>
+          <a:prstGeom prst="rect">
+            <a:avLst/>
+          </a:prstGeom>
+          <a:solidFill>
+            <a:srgbClr val="D93A2B"/>
+          </a:solidFill>
+          <a:ln>
+            <a:noFill/>
+          </a:ln>
+          <a:effectLst/>
+        </p:spPr>
+        <p:style>
+          <a:lnRef idx="1">
+            <a:schemeClr val="accent1"/>
+          </a:lnRef>
+          <a:fillRef idx="3">
+            <a:schemeClr val="accent1"/>
+          </a:fillRef>
+          <a:effectRef idx="2">
+            <a:schemeClr val="accent1"/>
+          </a:effectRef>
+          <a:fontRef idx="minor">
+            <a:schemeClr val="lt1"/>
+          </a:fontRef>
+        </p:style>
+        <p:txBody>
+          <a:bodyPr rtlCol="0" anchor="ctr"/>
+          <a:lstStyle/>
+          <a:p>
+            <a:pPr algn="ctr"/>
+          </a:p>
+        </p:txBody>
+      </p:sp>
+      <p:sp>
+        <p:nvSpPr>
+          <p:cNvPr id="4" name="TextBox 3"/>
+          <p:cNvSpPr txBox="1"/>
+          <p:nvPr/>
+        </p:nvSpPr>
+        <p:spPr>
+          <a:xfrm>
+            <a:off x="841248" y="457200"/>
+            <a:ext cx="8229600" cy="274320"/>
+          </a:xfrm>
+          <a:prstGeom prst="rect">
+            <a:avLst/>
+          </a:prstGeom>
+          <a:noFill/>
+        </p:spPr>
+        <p:txBody>
+          <a:bodyPr wrap="square" lIns="0" rIns="0" tIns="0" bIns="0" anchor="t">
+            <a:spAutoFit/>
+          </a:bodyPr>
+          <a:lstStyle/>
+          <a:p>
+            <a:pPr algn="l">
+              <a:lnSpc>
+                <a:spcPct val="110000"/>
+              </a:lnSpc>
+              <a:spcAft>
+                <a:spcPts val="0"/>
+              </a:spcAft>
+            </a:pPr>
+            <a:r>
+              <a:rPr sz="1150" b="1" i="0">
+                <a:solidFill>
+                  <a:srgbClr val="F2A03D"/>
+                </a:solidFill>
+                <a:latin typeface="Segoe UI"/>
+              </a:rPr>
+              <a:t>VR READINESS</a:t>
+            </a:r>
+          </a:p>
+        </p:txBody>
+      </p:sp>
+      <p:sp>
+        <p:nvSpPr>
+          <p:cNvPr id="5" name="TextBox 4"/>
+          <p:cNvSpPr txBox="1"/>
+          <p:nvPr/>
+        </p:nvSpPr>
+        <p:spPr>
+          <a:xfrm>
+            <a:off x="640080" y="786384"/>
+            <a:ext cx="10607040" cy="685800"/>
+          </a:xfrm>
+          <a:prstGeom prst="rect">
+            <a:avLst/>
+          </a:prstGeom>
+          <a:noFill/>
+        </p:spPr>
+        <p:txBody>
+          <a:bodyPr wrap="square" lIns="0" rIns="0" tIns="0" bIns="0" anchor="t">
+            <a:spAutoFit/>
+          </a:bodyPr>
+          <a:lstStyle/>
+          <a:p>
+            <a:pPr algn="l">
+              <a:lnSpc>
+                <a:spcPct val="100000"/>
+              </a:lnSpc>
+              <a:spcAft>
+                <a:spcPts val="0"/>
+              </a:spcAft>
+            </a:pPr>
+            <a:r>
+              <a:rPr sz="3100" b="1" i="0">
+                <a:solidFill>
+                  <a:srgbClr val="ECF1F6"/>
+                </a:solidFill>
+                <a:latin typeface="Segoe UI"/>
+              </a:rPr>
+              <a:t>Proving the headset path without a headset</a:t>
+            </a:r>
+          </a:p>
+        </p:txBody>
+      </p:sp>
+      <p:sp>
+        <p:nvSpPr>
+          <p:cNvPr id="6" name="Rectangle 5"/>
+          <p:cNvSpPr/>
+          <p:nvPr/>
+        </p:nvSpPr>
+        <p:spPr>
+          <a:xfrm>
+            <a:off x="640080" y="1536192"/>
+            <a:ext cx="1188720" cy="41148"/>
+          </a:xfrm>
+          <a:prstGeom prst="rect">
+            <a:avLst/>
+          </a:prstGeom>
+          <a:solidFill>
+            <a:srgbClr val="F2A03D"/>
+          </a:solidFill>
+          <a:ln>
+            <a:noFill/>
+          </a:ln>
+          <a:effectLst/>
+        </p:spPr>
+        <p:style>
+          <a:lnRef idx="1">
+            <a:schemeClr val="accent1"/>
+          </a:lnRef>
+          <a:fillRef idx="3">
+            <a:schemeClr val="accent1"/>
+          </a:fillRef>
+          <a:effectRef idx="2">
+            <a:schemeClr val="accent1"/>
+          </a:effectRef>
+          <a:fontRef idx="minor">
+            <a:schemeClr val="lt1"/>
+          </a:fontRef>
+        </p:style>
+        <p:txBody>
+          <a:bodyPr rtlCol="0" anchor="ctr"/>
+          <a:lstStyle/>
+          <a:p>
+            <a:pPr algn="ctr"/>
+          </a:p>
+        </p:txBody>
+      </p:sp>
+      <p:sp>
+        <p:nvSpPr>
+          <p:cNvPr id="7" name="TextBox 6"/>
+          <p:cNvSpPr txBox="1"/>
+          <p:nvPr/>
+        </p:nvSpPr>
+        <p:spPr>
+          <a:xfrm>
+            <a:off x="11002975" y="402336"/>
+            <a:ext cx="548640" cy="274320"/>
+          </a:xfrm>
+          <a:prstGeom prst="rect">
+            <a:avLst/>
+          </a:prstGeom>
+          <a:noFill/>
+        </p:spPr>
+        <p:txBody>
+          <a:bodyPr wrap="square" lIns="0" rIns="0" tIns="0" bIns="0" anchor="t">
+            <a:spAutoFit/>
+          </a:bodyPr>
+          <a:lstStyle/>
+          <a:p>
+            <a:pPr algn="r">
+              <a:lnSpc>
+                <a:spcPct val="110000"/>
+              </a:lnSpc>
+              <a:spcAft>
+                <a:spcPts val="0"/>
+              </a:spcAft>
+            </a:pPr>
+            <a:r>
+              <a:rPr sz="1200" b="0" i="0">
+                <a:solidFill>
+                  <a:srgbClr val="6E7C8B"/>
+                </a:solidFill>
+                <a:latin typeface="Segoe UI"/>
+              </a:rPr>
+              <a:t>19</a:t>
+            </a:r>
+          </a:p>
+        </p:txBody>
+      </p:sp>
+      <p:sp>
+        <p:nvSpPr>
+          <p:cNvPr id="8" name="TextBox 7"/>
+          <p:cNvSpPr txBox="1"/>
+          <p:nvPr/>
+        </p:nvSpPr>
+        <p:spPr>
+          <a:xfrm>
+            <a:off x="640080" y="6437376"/>
+            <a:ext cx="7315200" cy="228600"/>
+          </a:xfrm>
+          <a:prstGeom prst="rect">
+            <a:avLst/>
+          </a:prstGeom>
+          <a:noFill/>
+        </p:spPr>
+        <p:txBody>
+          <a:bodyPr wrap="square" lIns="0" rIns="0" tIns="0" bIns="0" anchor="t">
+            <a:spAutoFit/>
+          </a:bodyPr>
+          <a:lstStyle/>
+          <a:p>
+            <a:pPr algn="l">
+              <a:lnSpc>
+                <a:spcPct val="110000"/>
+              </a:lnSpc>
+              <a:spcAft>
+                <a:spcPts val="0"/>
+              </a:spcAft>
+            </a:pPr>
+            <a:r>
+              <a:rPr sz="900" b="0" i="0">
+                <a:solidFill>
+                  <a:srgbClr val="6E7C8B"/>
+                </a:solidFill>
+                <a:latin typeface="Segoe UI"/>
+              </a:rPr>
+              <a:t>VR Fire Safety &amp; Evacuation Trainer  ·  implementation review</a:t>
+            </a:r>
+          </a:p>
+        </p:txBody>
+      </p:sp>
+      <p:sp>
+        <p:nvSpPr>
+          <p:cNvPr id="9" name="TextBox 8"/>
+          <p:cNvSpPr txBox="1"/>
+          <p:nvPr/>
+        </p:nvSpPr>
+        <p:spPr>
+          <a:xfrm>
+            <a:off x="9814255" y="6437376"/>
+            <a:ext cx="1737360" cy="228600"/>
+          </a:xfrm>
+          <a:prstGeom prst="rect">
+            <a:avLst/>
+          </a:prstGeom>
+          <a:noFill/>
+        </p:spPr>
+        <p:txBody>
+          <a:bodyPr wrap="square" lIns="0" rIns="0" tIns="0" bIns="0" anchor="t">
+            <a:spAutoFit/>
+          </a:bodyPr>
+          <a:lstStyle/>
+          <a:p>
+            <a:pPr algn="r">
+              <a:lnSpc>
+                <a:spcPct val="110000"/>
+              </a:lnSpc>
+              <a:spcAft>
+                <a:spcPts val="0"/>
+              </a:spcAft>
+            </a:pPr>
+            <a:r>
+              <a:rPr sz="900" b="0" i="0">
+                <a:solidFill>
+                  <a:srgbClr val="6E7C8B"/>
+                </a:solidFill>
+                <a:latin typeface="Segoe UI"/>
+              </a:rPr>
+              <a:t>Unity 6000.5.3f1  ·  URP</a:t>
+            </a:r>
+          </a:p>
+        </p:txBody>
+      </p:sp>
+      <p:sp>
+        <p:nvSpPr>
+          <p:cNvPr id="10" name="Rounded Rectangle 9"/>
+          <p:cNvSpPr/>
+          <p:nvPr/>
+        </p:nvSpPr>
+        <p:spPr>
+          <a:xfrm>
+            <a:off x="640080" y="1783080"/>
+            <a:ext cx="3520440" cy="1371600"/>
+          </a:xfrm>
+          <a:prstGeom prst="roundRect">
+            <a:avLst>
+              <a:gd name="adj" fmla="val 2000"/>
+            </a:avLst>
+          </a:prstGeom>
+          <a:solidFill>
+            <a:srgbClr val="17212C"/>
+          </a:solidFill>
+          <a:ln w="9525">
+            <a:solidFill>
+              <a:srgbClr val="1E2A37"/>
+            </a:solidFill>
+          </a:ln>
+          <a:effectLst/>
+        </p:spPr>
+        <p:style>
+          <a:lnRef idx="1">
+            <a:schemeClr val="accent1"/>
+          </a:lnRef>
+          <a:fillRef idx="3">
+            <a:schemeClr val="accent1"/>
+          </a:fillRef>
+          <a:effectRef idx="2">
+            <a:schemeClr val="accent1"/>
+          </a:effectRef>
+          <a:fontRef idx="minor">
+            <a:schemeClr val="lt1"/>
+          </a:fontRef>
+        </p:style>
+        <p:txBody>
+          <a:bodyPr rtlCol="0" anchor="ctr"/>
+          <a:lstStyle/>
+          <a:p>
+            <a:pPr algn="ctr"/>
+          </a:p>
+        </p:txBody>
+      </p:sp>
+      <p:sp>
+        <p:nvSpPr>
+          <p:cNvPr id="11" name="Rectangle 10"/>
+          <p:cNvSpPr/>
+          <p:nvPr/>
+        </p:nvSpPr>
+        <p:spPr>
+          <a:xfrm>
+            <a:off x="640080" y="1801368"/>
+            <a:ext cx="64008" cy="1335024"/>
+          </a:xfrm>
+          <a:prstGeom prst="rect">
+            <a:avLst/>
+          </a:prstGeom>
+          <a:solidFill>
+            <a:srgbClr val="F2A03D"/>
+          </a:solidFill>
+          <a:ln>
+            <a:noFill/>
+          </a:ln>
+          <a:effectLst/>
+        </p:spPr>
+        <p:style>
+          <a:lnRef idx="1">
+            <a:schemeClr val="accent1"/>
+          </a:lnRef>
+          <a:fillRef idx="3">
+            <a:schemeClr val="accent1"/>
+          </a:fillRef>
+          <a:effectRef idx="2">
+            <a:schemeClr val="accent1"/>
+          </a:effectRef>
+          <a:fontRef idx="minor">
+            <a:schemeClr val="lt1"/>
+          </a:fontRef>
+        </p:style>
+        <p:txBody>
+          <a:bodyPr rtlCol="0" anchor="ctr"/>
+          <a:lstStyle/>
+          <a:p>
+            <a:pPr algn="ctr"/>
+          </a:p>
+        </p:txBody>
+      </p:sp>
+      <p:sp>
+        <p:nvSpPr>
+          <p:cNvPr id="12" name="TextBox 11"/>
+          <p:cNvSpPr txBox="1"/>
+          <p:nvPr/>
+        </p:nvSpPr>
+        <p:spPr>
+          <a:xfrm>
+            <a:off x="822959" y="1901952"/>
+            <a:ext cx="457200" cy="365760"/>
+          </a:xfrm>
+          <a:prstGeom prst="rect">
+            <a:avLst/>
+          </a:prstGeom>
+          <a:noFill/>
+        </p:spPr>
+        <p:txBody>
+          <a:bodyPr wrap="square" lIns="0" rIns="0" tIns="0" bIns="0" anchor="t">
+            <a:spAutoFit/>
+          </a:bodyPr>
+          <a:lstStyle/>
+          <a:p>
+            <a:pPr algn="l">
+              <a:lnSpc>
+                <a:spcPct val="110000"/>
+              </a:lnSpc>
+              <a:spcAft>
+                <a:spcPts val="0"/>
+              </a:spcAft>
+            </a:pPr>
+            <a:r>
+              <a:rPr sz="1900" b="1" i="0">
+                <a:solidFill>
+                  <a:srgbClr val="F2A03D"/>
+                </a:solidFill>
+                <a:latin typeface="Segoe UI"/>
+              </a:rPr>
+              <a:t>1</a:t>
+            </a:r>
+          </a:p>
+        </p:txBody>
+      </p:sp>
+      <p:sp>
+        <p:nvSpPr>
+          <p:cNvPr id="13" name="TextBox 12"/>
+          <p:cNvSpPr txBox="1"/>
+          <p:nvPr/>
+        </p:nvSpPr>
+        <p:spPr>
+          <a:xfrm>
+            <a:off x="1243584" y="1938528"/>
+            <a:ext cx="2743200" cy="292608"/>
+          </a:xfrm>
+          <a:prstGeom prst="rect">
+            <a:avLst/>
+          </a:prstGeom>
+          <a:noFill/>
+        </p:spPr>
+        <p:txBody>
+          <a:bodyPr wrap="square" lIns="0" rIns="0" tIns="0" bIns="0" anchor="t">
+            <a:spAutoFit/>
+          </a:bodyPr>
+          <a:lstStyle/>
+          <a:p>
+            <a:pPr algn="l">
+              <a:lnSpc>
+                <a:spcPct val="110000"/>
+              </a:lnSpc>
+              <a:spcAft>
+                <a:spcPts val="0"/>
+              </a:spcAft>
+            </a:pPr>
+            <a:r>
+              <a:rPr sz="1250" b="1" i="0">
+                <a:solidFill>
+                  <a:srgbClr val="ECF1F6"/>
+                </a:solidFill>
+                <a:latin typeface="Segoe UI"/>
+              </a:rPr>
+              <a:t>Machine-written report</a:t>
+            </a:r>
+          </a:p>
+        </p:txBody>
+      </p:sp>
+      <p:sp>
+        <p:nvSpPr>
+          <p:cNvPr id="14" name="TextBox 13"/>
+          <p:cNvSpPr txBox="1"/>
+          <p:nvPr/>
+        </p:nvSpPr>
+        <p:spPr>
+          <a:xfrm>
+            <a:off x="822959" y="2350008"/>
+            <a:ext cx="3200400" cy="731520"/>
+          </a:xfrm>
+          <a:prstGeom prst="rect">
+            <a:avLst/>
+          </a:prstGeom>
+          <a:noFill/>
+        </p:spPr>
+        <p:txBody>
+          <a:bodyPr wrap="square" lIns="0" rIns="0" tIns="0" bIns="0" anchor="t">
+            <a:spAutoFit/>
+          </a:bodyPr>
+          <a:lstStyle/>
+          <a:p>
+            <a:pPr algn="l">
+              <a:lnSpc>
+                <a:spcPct val="120000"/>
+              </a:lnSpc>
+              <a:spcAft>
+                <a:spcPts val="0"/>
+              </a:spcAft>
+            </a:pPr>
+            <a:r>
+              <a:rPr sz="950" b="0" i="0">
+                <a:solidFill>
+                  <a:srgbClr val="9BA8B6"/>
+                </a:solidFill>
+                <a:latin typeface="Segoe UI"/>
+              </a:rPr>
+              <a:t>Tools ▸ VR Fire Safety ▸ VR Readiness Report</a:t>
+            </a:r>
+          </a:p>
+          <a:p>
+            <a:pPr algn="l">
+              <a:lnSpc>
+                <a:spcPct val="120000"/>
+              </a:lnSpc>
+              <a:spcAft>
+                <a:spcPts val="0"/>
+              </a:spcAft>
+            </a:pPr>
+            <a:r>
+              <a:rPr sz="950" b="0" i="0">
+                <a:solidFill>
+                  <a:srgbClr val="9BA8B6"/>
+                </a:solidFill>
+                <a:latin typeface="Segoe UI"/>
+              </a:rPr>
+              <a:t>writes docs/VR-Readiness-Report.md from the live project state</a:t>
+            </a:r>
+          </a:p>
+        </p:txBody>
+      </p:sp>
+      <p:sp>
+        <p:nvSpPr>
+          <p:cNvPr id="15" name="Rounded Rectangle 14"/>
+          <p:cNvSpPr/>
+          <p:nvPr/>
+        </p:nvSpPr>
+        <p:spPr>
+          <a:xfrm>
+            <a:off x="4379976" y="1783080"/>
+            <a:ext cx="3520440" cy="1371600"/>
+          </a:xfrm>
+          <a:prstGeom prst="roundRect">
+            <a:avLst>
+              <a:gd name="adj" fmla="val 2000"/>
+            </a:avLst>
+          </a:prstGeom>
+          <a:solidFill>
+            <a:srgbClr val="17212C"/>
+          </a:solidFill>
+          <a:ln w="9525">
+            <a:solidFill>
+              <a:srgbClr val="1E2A37"/>
+            </a:solidFill>
+          </a:ln>
+          <a:effectLst/>
+        </p:spPr>
+        <p:style>
+          <a:lnRef idx="1">
+            <a:schemeClr val="accent1"/>
+          </a:lnRef>
+          <a:fillRef idx="3">
+            <a:schemeClr val="accent1"/>
+          </a:fillRef>
+          <a:effectRef idx="2">
+            <a:schemeClr val="accent1"/>
+          </a:effectRef>
+          <a:fontRef idx="minor">
+            <a:schemeClr val="lt1"/>
+          </a:fontRef>
+        </p:style>
+        <p:txBody>
+          <a:bodyPr rtlCol="0" anchor="ctr"/>
+          <a:lstStyle/>
+          <a:p>
+            <a:pPr algn="ctr"/>
+          </a:p>
+        </p:txBody>
+      </p:sp>
+      <p:sp>
+        <p:nvSpPr>
+          <p:cNvPr id="16" name="Rectangle 15"/>
+          <p:cNvSpPr/>
+          <p:nvPr/>
+        </p:nvSpPr>
+        <p:spPr>
+          <a:xfrm>
+            <a:off x="4379976" y="1801368"/>
+            <a:ext cx="64008" cy="1335024"/>
+          </a:xfrm>
+          <a:prstGeom prst="rect">
+            <a:avLst/>
+          </a:prstGeom>
+          <a:solidFill>
+            <a:srgbClr val="F2A03D"/>
+          </a:solidFill>
+          <a:ln>
+            <a:noFill/>
+          </a:ln>
+          <a:effectLst/>
+        </p:spPr>
+        <p:style>
+          <a:lnRef idx="1">
+            <a:schemeClr val="accent1"/>
+          </a:lnRef>
+          <a:fillRef idx="3">
+            <a:schemeClr val="accent1"/>
+          </a:fillRef>
+          <a:effectRef idx="2">
+            <a:schemeClr val="accent1"/>
+          </a:effectRef>
+          <a:fontRef idx="minor">
+            <a:schemeClr val="lt1"/>
+          </a:fontRef>
+        </p:style>
+        <p:txBody>
+          <a:bodyPr rtlCol="0" anchor="ctr"/>
+          <a:lstStyle/>
+          <a:p>
+            <a:pPr algn="ctr"/>
+          </a:p>
+        </p:txBody>
+      </p:sp>
+      <p:sp>
+        <p:nvSpPr>
+          <p:cNvPr id="17" name="TextBox 16"/>
+          <p:cNvSpPr txBox="1"/>
+          <p:nvPr/>
+        </p:nvSpPr>
+        <p:spPr>
+          <a:xfrm>
+            <a:off x="4562856" y="1901952"/>
+            <a:ext cx="457200" cy="365760"/>
+          </a:xfrm>
+          <a:prstGeom prst="rect">
+            <a:avLst/>
+          </a:prstGeom>
+          <a:noFill/>
+        </p:spPr>
+        <p:txBody>
+          <a:bodyPr wrap="square" lIns="0" rIns="0" tIns="0" bIns="0" anchor="t">
+            <a:spAutoFit/>
+          </a:bodyPr>
+          <a:lstStyle/>
+          <a:p>
+            <a:pPr algn="l">
+              <a:lnSpc>
+                <a:spcPct val="110000"/>
+              </a:lnSpc>
+              <a:spcAft>
+                <a:spcPts val="0"/>
+              </a:spcAft>
+            </a:pPr>
+            <a:r>
+              <a:rPr sz="1900" b="1" i="0">
+                <a:solidFill>
+                  <a:srgbClr val="F2A03D"/>
+                </a:solidFill>
+                <a:latin typeface="Segoe UI"/>
+              </a:rPr>
+              <a:t>2</a:t>
+            </a:r>
+          </a:p>
+        </p:txBody>
+      </p:sp>
+      <p:sp>
+        <p:nvSpPr>
+          <p:cNvPr id="18" name="TextBox 17"/>
+          <p:cNvSpPr txBox="1"/>
+          <p:nvPr/>
+        </p:nvSpPr>
+        <p:spPr>
+          <a:xfrm>
+            <a:off x="4983480" y="1938528"/>
+            <a:ext cx="2743200" cy="292608"/>
+          </a:xfrm>
+          <a:prstGeom prst="rect">
+            <a:avLst/>
+          </a:prstGeom>
+          <a:noFill/>
+        </p:spPr>
+        <p:txBody>
+          <a:bodyPr wrap="square" lIns="0" rIns="0" tIns="0" bIns="0" anchor="t">
+            <a:spAutoFit/>
+          </a:bodyPr>
+          <a:lstStyle/>
+          <a:p>
+            <a:pPr algn="l">
+              <a:lnSpc>
+                <a:spcPct val="110000"/>
+              </a:lnSpc>
+              <a:spcAft>
+                <a:spcPts val="0"/>
+              </a:spcAft>
+            </a:pPr>
+            <a:r>
+              <a:rPr sz="1250" b="1" i="0">
+                <a:solidFill>
+                  <a:srgbClr val="ECF1F6"/>
+                </a:solidFill>
+                <a:latin typeface="Segoe UI"/>
+              </a:rPr>
+              <a:t>Stereo in the Editor</a:t>
+            </a:r>
+          </a:p>
+        </p:txBody>
+      </p:sp>
+      <p:sp>
+        <p:nvSpPr>
+          <p:cNvPr id="19" name="TextBox 18"/>
+          <p:cNvSpPr txBox="1"/>
+          <p:nvPr/>
+        </p:nvSpPr>
+        <p:spPr>
+          <a:xfrm>
+            <a:off x="4562856" y="2350008"/>
+            <a:ext cx="3200400" cy="731520"/>
+          </a:xfrm>
+          <a:prstGeom prst="rect">
+            <a:avLst/>
+          </a:prstGeom>
+          <a:noFill/>
+        </p:spPr>
+        <p:txBody>
+          <a:bodyPr wrap="square" lIns="0" rIns="0" tIns="0" bIns="0" anchor="t">
+            <a:spAutoFit/>
+          </a:bodyPr>
+          <a:lstStyle/>
+          <a:p>
+            <a:pPr algn="l">
+              <a:lnSpc>
+                <a:spcPct val="120000"/>
+              </a:lnSpc>
+              <a:spcAft>
+                <a:spcPts val="0"/>
+              </a:spcAft>
+            </a:pPr>
+            <a:r>
+              <a:rPr sz="950" b="0" i="0">
+                <a:solidFill>
+                  <a:srgbClr val="9BA8B6"/>
+                </a:solidFill>
+                <a:latin typeface="Segoe UI"/>
+              </a:rPr>
+              <a:t>Mock HMD + Game view ▸ Both Eyes</a:t>
+            </a:r>
+          </a:p>
+          <a:p>
+            <a:pPr algn="l">
+              <a:lnSpc>
+                <a:spcPct val="120000"/>
+              </a:lnSpc>
+              <a:spcAft>
+                <a:spcPts val="0"/>
+              </a:spcAft>
+            </a:pPr>
+            <a:r>
+              <a:rPr sz="950" b="0" i="0">
+                <a:solidFill>
+                  <a:srgbClr val="9BA8B6"/>
+                </a:solidFill>
+                <a:latin typeface="Segoe UI"/>
+              </a:rPr>
+              <a:t>the scene rendered twice, once per eye</a:t>
+            </a:r>
+          </a:p>
+        </p:txBody>
+      </p:sp>
+      <p:sp>
+        <p:nvSpPr>
+          <p:cNvPr id="20" name="Rounded Rectangle 19"/>
+          <p:cNvSpPr/>
+          <p:nvPr/>
+        </p:nvSpPr>
+        <p:spPr>
+          <a:xfrm>
+            <a:off x="8119871" y="1783080"/>
+            <a:ext cx="3520440" cy="1371600"/>
+          </a:xfrm>
+          <a:prstGeom prst="roundRect">
+            <a:avLst>
+              <a:gd name="adj" fmla="val 2000"/>
+            </a:avLst>
+          </a:prstGeom>
+          <a:solidFill>
+            <a:srgbClr val="17212C"/>
+          </a:solidFill>
+          <a:ln w="9525">
+            <a:solidFill>
+              <a:srgbClr val="1E2A37"/>
+            </a:solidFill>
+          </a:ln>
+          <a:effectLst/>
+        </p:spPr>
+        <p:style>
+          <a:lnRef idx="1">
+            <a:schemeClr val="accent1"/>
+          </a:lnRef>
+          <a:fillRef idx="3">
+            <a:schemeClr val="accent1"/>
+          </a:fillRef>
+          <a:effectRef idx="2">
+            <a:schemeClr val="accent1"/>
+          </a:effectRef>
+          <a:fontRef idx="minor">
+            <a:schemeClr val="lt1"/>
+          </a:fontRef>
+        </p:style>
+        <p:txBody>
+          <a:bodyPr rtlCol="0" anchor="ctr"/>
+          <a:lstStyle/>
+          <a:p>
+            <a:pPr algn="ctr"/>
+          </a:p>
+        </p:txBody>
+      </p:sp>
+      <p:sp>
+        <p:nvSpPr>
+          <p:cNvPr id="21" name="Rectangle 20"/>
+          <p:cNvSpPr/>
+          <p:nvPr/>
+        </p:nvSpPr>
+        <p:spPr>
+          <a:xfrm>
+            <a:off x="8119871" y="1801368"/>
+            <a:ext cx="64008" cy="1335024"/>
+          </a:xfrm>
+          <a:prstGeom prst="rect">
+            <a:avLst/>
+          </a:prstGeom>
+          <a:solidFill>
+            <a:srgbClr val="F2A03D"/>
+          </a:solidFill>
+          <a:ln>
+            <a:noFill/>
+          </a:ln>
+          <a:effectLst/>
+        </p:spPr>
+        <p:style>
+          <a:lnRef idx="1">
+            <a:schemeClr val="accent1"/>
+          </a:lnRef>
+          <a:fillRef idx="3">
+            <a:schemeClr val="accent1"/>
+          </a:fillRef>
+          <a:effectRef idx="2">
+            <a:schemeClr val="accent1"/>
+          </a:effectRef>
+          <a:fontRef idx="minor">
+            <a:schemeClr val="lt1"/>
+          </a:fontRef>
+        </p:style>
+        <p:txBody>
+          <a:bodyPr rtlCol="0" anchor="ctr"/>
+          <a:lstStyle/>
+          <a:p>
+            <a:pPr algn="ctr"/>
+          </a:p>
+        </p:txBody>
+      </p:sp>
+      <p:sp>
+        <p:nvSpPr>
+          <p:cNvPr id="22" name="TextBox 21"/>
+          <p:cNvSpPr txBox="1"/>
+          <p:nvPr/>
+        </p:nvSpPr>
+        <p:spPr>
+          <a:xfrm>
+            <a:off x="8302751" y="1901952"/>
+            <a:ext cx="457200" cy="365760"/>
+          </a:xfrm>
+          <a:prstGeom prst="rect">
+            <a:avLst/>
+          </a:prstGeom>
+          <a:noFill/>
+        </p:spPr>
+        <p:txBody>
+          <a:bodyPr wrap="square" lIns="0" rIns="0" tIns="0" bIns="0" anchor="t">
+            <a:spAutoFit/>
+          </a:bodyPr>
+          <a:lstStyle/>
+          <a:p>
+            <a:pPr algn="l">
+              <a:lnSpc>
+                <a:spcPct val="110000"/>
+              </a:lnSpc>
+              <a:spcAft>
+                <a:spcPts val="0"/>
+              </a:spcAft>
+            </a:pPr>
+            <a:r>
+              <a:rPr sz="1900" b="1" i="0">
+                <a:solidFill>
+                  <a:srgbClr val="F2A03D"/>
+                </a:solidFill>
+                <a:latin typeface="Segoe UI"/>
+              </a:rPr>
+              <a:t>3</a:t>
+            </a:r>
+          </a:p>
+        </p:txBody>
+      </p:sp>
+      <p:sp>
+        <p:nvSpPr>
+          <p:cNvPr id="23" name="TextBox 22"/>
+          <p:cNvSpPr txBox="1"/>
+          <p:nvPr/>
+        </p:nvSpPr>
+        <p:spPr>
+          <a:xfrm>
+            <a:off x="8723376" y="1938528"/>
+            <a:ext cx="2743200" cy="292608"/>
+          </a:xfrm>
+          <a:prstGeom prst="rect">
+            <a:avLst/>
+          </a:prstGeom>
+          <a:noFill/>
+        </p:spPr>
+        <p:txBody>
+          <a:bodyPr wrap="square" lIns="0" rIns="0" tIns="0" bIns="0" anchor="t">
+            <a:spAutoFit/>
+          </a:bodyPr>
+          <a:lstStyle/>
+          <a:p>
+            <a:pPr algn="l">
+              <a:lnSpc>
+                <a:spcPct val="110000"/>
+              </a:lnSpc>
+              <a:spcAft>
+                <a:spcPts val="0"/>
+              </a:spcAft>
+            </a:pPr>
+            <a:r>
+              <a:rPr sz="1250" b="1" i="0">
+                <a:solidFill>
+                  <a:srgbClr val="ECF1F6"/>
+                </a:solidFill>
+                <a:latin typeface="Segoe UI"/>
+              </a:rPr>
+              <a:t>Live XR state</a:t>
+            </a:r>
+          </a:p>
+        </p:txBody>
+      </p:sp>
+      <p:sp>
+        <p:nvSpPr>
+          <p:cNvPr id="24" name="TextBox 23"/>
+          <p:cNvSpPr txBox="1"/>
+          <p:nvPr/>
+        </p:nvSpPr>
+        <p:spPr>
+          <a:xfrm>
+            <a:off x="8302751" y="2350008"/>
+            <a:ext cx="3200400" cy="731520"/>
+          </a:xfrm>
+          <a:prstGeom prst="rect">
+            <a:avLst/>
+          </a:prstGeom>
+          <a:noFill/>
+        </p:spPr>
+        <p:txBody>
+          <a:bodyPr wrap="square" lIns="0" rIns="0" tIns="0" bIns="0" anchor="t">
+            <a:spAutoFit/>
+          </a:bodyPr>
+          <a:lstStyle/>
+          <a:p>
+            <a:pPr algn="l">
+              <a:lnSpc>
+                <a:spcPct val="120000"/>
+              </a:lnSpc>
+              <a:spcAft>
+                <a:spcPts val="0"/>
+              </a:spcAft>
+            </a:pPr>
+            <a:r>
+              <a:rPr sz="950" b="0" i="0">
+                <a:solidFill>
+                  <a:srgbClr val="9BA8B6"/>
+                </a:solidFill>
+                <a:latin typeface="Segoe UI"/>
+              </a:rPr>
+              <a:t>Press F2 in Play mode</a:t>
+            </a:r>
+          </a:p>
+          <a:p>
+            <a:pPr algn="l">
+              <a:lnSpc>
+                <a:spcPct val="120000"/>
+              </a:lnSpc>
+              <a:spcAft>
+                <a:spcPts val="0"/>
+              </a:spcAft>
+            </a:pPr>
+            <a:r>
+              <a:rPr sz="950" b="0" i="0">
+                <a:solidFill>
+                  <a:srgbClr val="9BA8B6"/>
+                </a:solidFill>
+                <a:latin typeface="Segoe UI"/>
+              </a:rPr>
+              <a:t>session ACTIVE, stereo mode, tracking origin, controllers</a:t>
+            </a:r>
+          </a:p>
+        </p:txBody>
+      </p:sp>
+      <p:sp>
+        <p:nvSpPr>
+          <p:cNvPr id="25" name="Rounded Rectangle 24"/>
+          <p:cNvSpPr/>
+          <p:nvPr/>
+        </p:nvSpPr>
+        <p:spPr>
+          <a:xfrm>
+            <a:off x="640080" y="3355848"/>
+            <a:ext cx="3520440" cy="1371600"/>
+          </a:xfrm>
+          <a:prstGeom prst="roundRect">
+            <a:avLst>
+              <a:gd name="adj" fmla="val 2000"/>
+            </a:avLst>
+          </a:prstGeom>
+          <a:solidFill>
+            <a:srgbClr val="17212C"/>
+          </a:solidFill>
+          <a:ln w="9525">
+            <a:solidFill>
+              <a:srgbClr val="1E2A37"/>
+            </a:solidFill>
+          </a:ln>
+          <a:effectLst/>
+        </p:spPr>
+        <p:style>
+          <a:lnRef idx="1">
+            <a:schemeClr val="accent1"/>
+          </a:lnRef>
+          <a:fillRef idx="3">
+            <a:schemeClr val="accent1"/>
+          </a:fillRef>
+          <a:effectRef idx="2">
+            <a:schemeClr val="accent1"/>
+          </a:effectRef>
+          <a:fontRef idx="minor">
+            <a:schemeClr val="lt1"/>
+          </a:fontRef>
+        </p:style>
+        <p:txBody>
+          <a:bodyPr rtlCol="0" anchor="ctr"/>
+          <a:lstStyle/>
+          <a:p>
+            <a:pPr algn="ctr"/>
+          </a:p>
+        </p:txBody>
+      </p:sp>
+      <p:sp>
+        <p:nvSpPr>
+          <p:cNvPr id="26" name="Rectangle 25"/>
+          <p:cNvSpPr/>
+          <p:nvPr/>
+        </p:nvSpPr>
+        <p:spPr>
+          <a:xfrm>
+            <a:off x="640080" y="3374136"/>
+            <a:ext cx="64008" cy="1335024"/>
+          </a:xfrm>
+          <a:prstGeom prst="rect">
+            <a:avLst/>
+          </a:prstGeom>
+          <a:solidFill>
+            <a:srgbClr val="3FBF7F"/>
+          </a:solidFill>
+          <a:ln>
+            <a:noFill/>
+          </a:ln>
+          <a:effectLst/>
+        </p:spPr>
+        <p:style>
+          <a:lnRef idx="1">
+            <a:schemeClr val="accent1"/>
+          </a:lnRef>
+          <a:fillRef idx="3">
+            <a:schemeClr val="accent1"/>
+          </a:fillRef>
+          <a:effectRef idx="2">
+            <a:schemeClr val="accent1"/>
+          </a:effectRef>
+          <a:fontRef idx="minor">
+            <a:schemeClr val="lt1"/>
+          </a:fontRef>
+        </p:style>
+        <p:txBody>
+          <a:bodyPr rtlCol="0" anchor="ctr"/>
+          <a:lstStyle/>
+          <a:p>
+            <a:pPr algn="ctr"/>
+          </a:p>
+        </p:txBody>
+      </p:sp>
+      <p:sp>
+        <p:nvSpPr>
+          <p:cNvPr id="27" name="TextBox 26"/>
+          <p:cNvSpPr txBox="1"/>
+          <p:nvPr/>
+        </p:nvSpPr>
+        <p:spPr>
+          <a:xfrm>
+            <a:off x="822959" y="3474720"/>
+            <a:ext cx="457200" cy="365760"/>
+          </a:xfrm>
+          <a:prstGeom prst="rect">
+            <a:avLst/>
+          </a:prstGeom>
+          <a:noFill/>
+        </p:spPr>
+        <p:txBody>
+          <a:bodyPr wrap="square" lIns="0" rIns="0" tIns="0" bIns="0" anchor="t">
+            <a:spAutoFit/>
+          </a:bodyPr>
+          <a:lstStyle/>
+          <a:p>
+            <a:pPr algn="l">
+              <a:lnSpc>
+                <a:spcPct val="110000"/>
+              </a:lnSpc>
+              <a:spcAft>
+                <a:spcPts val="0"/>
+              </a:spcAft>
+            </a:pPr>
+            <a:r>
+              <a:rPr sz="1900" b="1" i="0">
+                <a:solidFill>
+                  <a:srgbClr val="3FBF7F"/>
+                </a:solidFill>
+                <a:latin typeface="Segoe UI"/>
+              </a:rPr>
+              <a:t>4</a:t>
+            </a:r>
+          </a:p>
+        </p:txBody>
+      </p:sp>
+      <p:sp>
+        <p:nvSpPr>
+          <p:cNvPr id="28" name="TextBox 27"/>
+          <p:cNvSpPr txBox="1"/>
+          <p:nvPr/>
+        </p:nvSpPr>
+        <p:spPr>
+          <a:xfrm>
+            <a:off x="1243584" y="3511296"/>
+            <a:ext cx="2743200" cy="292608"/>
+          </a:xfrm>
+          <a:prstGeom prst="rect">
+            <a:avLst/>
+          </a:prstGeom>
+          <a:noFill/>
+        </p:spPr>
+        <p:txBody>
+          <a:bodyPr wrap="square" lIns="0" rIns="0" tIns="0" bIns="0" anchor="t">
+            <a:spAutoFit/>
+          </a:bodyPr>
+          <a:lstStyle/>
+          <a:p>
+            <a:pPr algn="l">
+              <a:lnSpc>
+                <a:spcPct val="110000"/>
+              </a:lnSpc>
+              <a:spcAft>
+                <a:spcPts val="0"/>
+              </a:spcAft>
+            </a:pPr>
+            <a:r>
+              <a:rPr sz="1250" b="1" i="0">
+                <a:solidFill>
+                  <a:srgbClr val="ECF1F6"/>
+                </a:solidFill>
+                <a:latin typeface="Segoe UI"/>
+              </a:rPr>
+              <a:t>Settings screens</a:t>
+            </a:r>
+          </a:p>
+        </p:txBody>
+      </p:sp>
+      <p:sp>
+        <p:nvSpPr>
+          <p:cNvPr id="29" name="TextBox 28"/>
+          <p:cNvSpPr txBox="1"/>
+          <p:nvPr/>
+        </p:nvSpPr>
+        <p:spPr>
+          <a:xfrm>
+            <a:off x="822959" y="3922776"/>
+            <a:ext cx="3200400" cy="731520"/>
+          </a:xfrm>
+          <a:prstGeom prst="rect">
+            <a:avLst/>
+          </a:prstGeom>
+          <a:noFill/>
+        </p:spPr>
+        <p:txBody>
+          <a:bodyPr wrap="square" lIns="0" rIns="0" tIns="0" bIns="0" anchor="t">
+            <a:spAutoFit/>
+          </a:bodyPr>
+          <a:lstStyle/>
+          <a:p>
+            <a:pPr algn="l">
+              <a:lnSpc>
+                <a:spcPct val="120000"/>
+              </a:lnSpc>
+              <a:spcAft>
+                <a:spcPts val="0"/>
+              </a:spcAft>
+            </a:pPr>
+            <a:r>
+              <a:rPr sz="950" b="0" i="0">
+                <a:solidFill>
+                  <a:srgbClr val="9BA8B6"/>
+                </a:solidFill>
+                <a:latin typeface="Segoe UI"/>
+              </a:rPr>
+              <a:t>OpenXR ticked · interaction profile listed</a:t>
+            </a:r>
+          </a:p>
+          <a:p>
+            <a:pPr algn="l">
+              <a:lnSpc>
+                <a:spcPct val="120000"/>
+              </a:lnSpc>
+              <a:spcAft>
+                <a:spcPts val="0"/>
+              </a:spcAft>
+            </a:pPr>
+            <a:r>
+              <a:rPr sz="950" b="0" i="0">
+                <a:solidFill>
+                  <a:srgbClr val="9BA8B6"/>
+                </a:solidFill>
+                <a:latin typeface="Segoe UI"/>
+              </a:rPr>
+              <a:t>Single Pass Instanced · IL2CPP · ARM64 · API 29</a:t>
+            </a:r>
+          </a:p>
+        </p:txBody>
+      </p:sp>
+      <p:sp>
+        <p:nvSpPr>
+          <p:cNvPr id="30" name="Rounded Rectangle 29"/>
+          <p:cNvSpPr/>
+          <p:nvPr/>
+        </p:nvSpPr>
+        <p:spPr>
+          <a:xfrm>
+            <a:off x="4379976" y="3355848"/>
+            <a:ext cx="3520440" cy="1371600"/>
+          </a:xfrm>
+          <a:prstGeom prst="roundRect">
+            <a:avLst>
+              <a:gd name="adj" fmla="val 2000"/>
+            </a:avLst>
+          </a:prstGeom>
+          <a:solidFill>
+            <a:srgbClr val="17212C"/>
+          </a:solidFill>
+          <a:ln w="9525">
+            <a:solidFill>
+              <a:srgbClr val="1E2A37"/>
+            </a:solidFill>
+          </a:ln>
+          <a:effectLst/>
+        </p:spPr>
+        <p:style>
+          <a:lnRef idx="1">
+            <a:schemeClr val="accent1"/>
+          </a:lnRef>
+          <a:fillRef idx="3">
+            <a:schemeClr val="accent1"/>
+          </a:fillRef>
+          <a:effectRef idx="2">
+            <a:schemeClr val="accent1"/>
+          </a:effectRef>
+          <a:fontRef idx="minor">
+            <a:schemeClr val="lt1"/>
+          </a:fontRef>
+        </p:style>
+        <p:txBody>
+          <a:bodyPr rtlCol="0" anchor="ctr"/>
+          <a:lstStyle/>
+          <a:p>
+            <a:pPr algn="ctr"/>
+          </a:p>
+        </p:txBody>
+      </p:sp>
+      <p:sp>
+        <p:nvSpPr>
+          <p:cNvPr id="31" name="Rectangle 30"/>
+          <p:cNvSpPr/>
+          <p:nvPr/>
+        </p:nvSpPr>
+        <p:spPr>
+          <a:xfrm>
+            <a:off x="4379976" y="3374136"/>
+            <a:ext cx="64008" cy="1335024"/>
+          </a:xfrm>
+          <a:prstGeom prst="rect">
+            <a:avLst/>
+          </a:prstGeom>
+          <a:solidFill>
+            <a:srgbClr val="3FBF7F"/>
+          </a:solidFill>
+          <a:ln>
+            <a:noFill/>
+          </a:ln>
+          <a:effectLst/>
+        </p:spPr>
+        <p:style>
+          <a:lnRef idx="1">
+            <a:schemeClr val="accent1"/>
+          </a:lnRef>
+          <a:fillRef idx="3">
+            <a:schemeClr val="accent1"/>
+          </a:fillRef>
+          <a:effectRef idx="2">
+            <a:schemeClr val="accent1"/>
+          </a:effectRef>
+          <a:fontRef idx="minor">
+            <a:schemeClr val="lt1"/>
+          </a:fontRef>
+        </p:style>
+        <p:txBody>
+          <a:bodyPr rtlCol="0" anchor="ctr"/>
+          <a:lstStyle/>
+          <a:p>
+            <a:pPr algn="ctr"/>
+          </a:p>
+        </p:txBody>
+      </p:sp>
+      <p:sp>
+        <p:nvSpPr>
+          <p:cNvPr id="32" name="TextBox 31"/>
+          <p:cNvSpPr txBox="1"/>
+          <p:nvPr/>
+        </p:nvSpPr>
+        <p:spPr>
+          <a:xfrm>
+            <a:off x="4562856" y="3474720"/>
+            <a:ext cx="457200" cy="365760"/>
+          </a:xfrm>
+          <a:prstGeom prst="rect">
+            <a:avLst/>
+          </a:prstGeom>
+          <a:noFill/>
+        </p:spPr>
+        <p:txBody>
+          <a:bodyPr wrap="square" lIns="0" rIns="0" tIns="0" bIns="0" anchor="t">
+            <a:spAutoFit/>
+          </a:bodyPr>
+          <a:lstStyle/>
+          <a:p>
+            <a:pPr algn="l">
+              <a:lnSpc>
+                <a:spcPct val="110000"/>
+              </a:lnSpc>
+              <a:spcAft>
+                <a:spcPts val="0"/>
+              </a:spcAft>
+            </a:pPr>
+            <a:r>
+              <a:rPr sz="1900" b="1" i="0">
+                <a:solidFill>
+                  <a:srgbClr val="3FBF7F"/>
+                </a:solidFill>
+                <a:latin typeface="Segoe UI"/>
+              </a:rPr>
+              <a:t>5</a:t>
+            </a:r>
+          </a:p>
+        </p:txBody>
+      </p:sp>
+      <p:sp>
+        <p:nvSpPr>
+          <p:cNvPr id="33" name="TextBox 32"/>
+          <p:cNvSpPr txBox="1"/>
+          <p:nvPr/>
+        </p:nvSpPr>
+        <p:spPr>
+          <a:xfrm>
+            <a:off x="4983480" y="3511296"/>
+            <a:ext cx="2743200" cy="292608"/>
+          </a:xfrm>
+          <a:prstGeom prst="rect">
+            <a:avLst/>
+          </a:prstGeom>
+          <a:noFill/>
+        </p:spPr>
+        <p:txBody>
+          <a:bodyPr wrap="square" lIns="0" rIns="0" tIns="0" bIns="0" anchor="t">
+            <a:spAutoFit/>
+          </a:bodyPr>
+          <a:lstStyle/>
+          <a:p>
+            <a:pPr algn="l">
+              <a:lnSpc>
+                <a:spcPct val="110000"/>
+              </a:lnSpc>
+              <a:spcAft>
+                <a:spcPts val="0"/>
+              </a:spcAft>
+            </a:pPr>
+            <a:r>
+              <a:rPr sz="1250" b="1" i="0">
+                <a:solidFill>
+                  <a:srgbClr val="ECF1F6"/>
+                </a:solidFill>
+                <a:latin typeface="Segoe UI"/>
+              </a:rPr>
+              <a:t>Build proof</a:t>
+            </a:r>
+          </a:p>
+        </p:txBody>
+      </p:sp>
+      <p:sp>
+        <p:nvSpPr>
+          <p:cNvPr id="34" name="TextBox 33"/>
+          <p:cNvSpPr txBox="1"/>
+          <p:nvPr/>
+        </p:nvSpPr>
+        <p:spPr>
+          <a:xfrm>
+            <a:off x="4562856" y="3922776"/>
+            <a:ext cx="3200400" cy="731520"/>
+          </a:xfrm>
+          <a:prstGeom prst="rect">
+            <a:avLst/>
+          </a:prstGeom>
+          <a:noFill/>
+        </p:spPr>
+        <p:txBody>
+          <a:bodyPr wrap="square" lIns="0" rIns="0" tIns="0" bIns="0" anchor="t">
+            <a:spAutoFit/>
+          </a:bodyPr>
+          <a:lstStyle/>
+          <a:p>
+            <a:pPr algn="l">
+              <a:lnSpc>
+                <a:spcPct val="120000"/>
+              </a:lnSpc>
+              <a:spcAft>
+                <a:spcPts val="0"/>
+              </a:spcAft>
+            </a:pPr>
+            <a:r>
+              <a:rPr sz="950" b="0" i="0">
+                <a:solidFill>
+                  <a:srgbClr val="9BA8B6"/>
+                </a:solidFill>
+                <a:latin typeface="Segoe UI"/>
+              </a:rPr>
+              <a:t>Android ▸ Build (no device attached)</a:t>
+            </a:r>
+          </a:p>
+          <a:p>
+            <a:pPr algn="l">
+              <a:lnSpc>
+                <a:spcPct val="120000"/>
+              </a:lnSpc>
+              <a:spcAft>
+                <a:spcPts val="0"/>
+              </a:spcAft>
+            </a:pPr>
+            <a:r>
+              <a:rPr sz="950" b="0" i="0">
+                <a:solidFill>
+                  <a:srgbClr val="9BA8B6"/>
+                </a:solidFill>
+                <a:latin typeface="Segoe UI"/>
+              </a:rPr>
+              <a:t>XR, IL2CPP, ARM64 and shaders all compile</a:t>
+            </a:r>
+          </a:p>
+        </p:txBody>
+      </p:sp>
+      <p:sp>
+        <p:nvSpPr>
+          <p:cNvPr id="35" name="Rounded Rectangle 34"/>
+          <p:cNvSpPr/>
+          <p:nvPr/>
+        </p:nvSpPr>
+        <p:spPr>
+          <a:xfrm>
+            <a:off x="8119871" y="3355848"/>
+            <a:ext cx="3520440" cy="1371600"/>
+          </a:xfrm>
+          <a:prstGeom prst="roundRect">
+            <a:avLst>
+              <a:gd name="adj" fmla="val 2000"/>
+            </a:avLst>
+          </a:prstGeom>
+          <a:solidFill>
+            <a:srgbClr val="17212C"/>
+          </a:solidFill>
+          <a:ln w="9525">
+            <a:solidFill>
+              <a:srgbClr val="1E2A37"/>
+            </a:solidFill>
+          </a:ln>
+          <a:effectLst/>
+        </p:spPr>
+        <p:style>
+          <a:lnRef idx="1">
+            <a:schemeClr val="accent1"/>
+          </a:lnRef>
+          <a:fillRef idx="3">
+            <a:schemeClr val="accent1"/>
+          </a:fillRef>
+          <a:effectRef idx="2">
+            <a:schemeClr val="accent1"/>
+          </a:effectRef>
+          <a:fontRef idx="minor">
+            <a:schemeClr val="lt1"/>
+          </a:fontRef>
+        </p:style>
+        <p:txBody>
+          <a:bodyPr rtlCol="0" anchor="ctr"/>
+          <a:lstStyle/>
+          <a:p>
+            <a:pPr algn="ctr"/>
+          </a:p>
+        </p:txBody>
+      </p:sp>
+      <p:sp>
+        <p:nvSpPr>
+          <p:cNvPr id="36" name="Rectangle 35"/>
+          <p:cNvSpPr/>
+          <p:nvPr/>
+        </p:nvSpPr>
+        <p:spPr>
+          <a:xfrm>
+            <a:off x="8119871" y="3374136"/>
+            <a:ext cx="64008" cy="1335024"/>
+          </a:xfrm>
+          <a:prstGeom prst="rect">
+            <a:avLst/>
+          </a:prstGeom>
+          <a:solidFill>
+            <a:srgbClr val="3FBF7F"/>
+          </a:solidFill>
+          <a:ln>
+            <a:noFill/>
+          </a:ln>
+          <a:effectLst/>
+        </p:spPr>
+        <p:style>
+          <a:lnRef idx="1">
+            <a:schemeClr val="accent1"/>
+          </a:lnRef>
+          <a:fillRef idx="3">
+            <a:schemeClr val="accent1"/>
+          </a:fillRef>
+          <a:effectRef idx="2">
+            <a:schemeClr val="accent1"/>
+          </a:effectRef>
+          <a:fontRef idx="minor">
+            <a:schemeClr val="lt1"/>
+          </a:fontRef>
+        </p:style>
+        <p:txBody>
+          <a:bodyPr rtlCol="0" anchor="ctr"/>
+          <a:lstStyle/>
+          <a:p>
+            <a:pPr algn="ctr"/>
+          </a:p>
+        </p:txBody>
+      </p:sp>
+      <p:sp>
+        <p:nvSpPr>
+          <p:cNvPr id="37" name="TextBox 36"/>
+          <p:cNvSpPr txBox="1"/>
+          <p:nvPr/>
+        </p:nvSpPr>
+        <p:spPr>
+          <a:xfrm>
+            <a:off x="8302751" y="3474720"/>
+            <a:ext cx="457200" cy="365760"/>
+          </a:xfrm>
+          <a:prstGeom prst="rect">
+            <a:avLst/>
+          </a:prstGeom>
+          <a:noFill/>
+        </p:spPr>
+        <p:txBody>
+          <a:bodyPr wrap="square" lIns="0" rIns="0" tIns="0" bIns="0" anchor="t">
+            <a:spAutoFit/>
+          </a:bodyPr>
+          <a:lstStyle/>
+          <a:p>
+            <a:pPr algn="l">
+              <a:lnSpc>
+                <a:spcPct val="110000"/>
+              </a:lnSpc>
+              <a:spcAft>
+                <a:spcPts val="0"/>
+              </a:spcAft>
+            </a:pPr>
+            <a:r>
+              <a:rPr sz="1900" b="1" i="0">
+                <a:solidFill>
+                  <a:srgbClr val="3FBF7F"/>
+                </a:solidFill>
+                <a:latin typeface="Segoe UI"/>
+              </a:rPr>
+              <a:t>6</a:t>
+            </a:r>
+          </a:p>
+        </p:txBody>
+      </p:sp>
+      <p:sp>
+        <p:nvSpPr>
+          <p:cNvPr id="38" name="TextBox 37"/>
+          <p:cNvSpPr txBox="1"/>
+          <p:nvPr/>
+        </p:nvSpPr>
+        <p:spPr>
+          <a:xfrm>
+            <a:off x="8723376" y="3511296"/>
+            <a:ext cx="2743200" cy="292608"/>
+          </a:xfrm>
+          <a:prstGeom prst="rect">
+            <a:avLst/>
+          </a:prstGeom>
+          <a:noFill/>
+        </p:spPr>
+        <p:txBody>
+          <a:bodyPr wrap="square" lIns="0" rIns="0" tIns="0" bIns="0" anchor="t">
+            <a:spAutoFit/>
+          </a:bodyPr>
+          <a:lstStyle/>
+          <a:p>
+            <a:pPr algn="l">
+              <a:lnSpc>
+                <a:spcPct val="110000"/>
+              </a:lnSpc>
+              <a:spcAft>
+                <a:spcPts val="0"/>
+              </a:spcAft>
+            </a:pPr>
+            <a:r>
+              <a:rPr sz="1250" b="1" i="0">
+                <a:solidFill>
+                  <a:srgbClr val="ECF1F6"/>
+                </a:solidFill>
+                <a:latin typeface="Segoe UI"/>
+              </a:rPr>
+              <a:t>Honest wording</a:t>
+            </a:r>
+          </a:p>
+        </p:txBody>
+      </p:sp>
+      <p:sp>
+        <p:nvSpPr>
+          <p:cNvPr id="39" name="TextBox 38"/>
+          <p:cNvSpPr txBox="1"/>
+          <p:nvPr/>
+        </p:nvSpPr>
+        <p:spPr>
+          <a:xfrm>
+            <a:off x="8302751" y="3922776"/>
+            <a:ext cx="3200400" cy="731520"/>
+          </a:xfrm>
+          <a:prstGeom prst="rect">
+            <a:avLst/>
+          </a:prstGeom>
+          <a:noFill/>
+        </p:spPr>
+        <p:txBody>
+          <a:bodyPr wrap="square" lIns="0" rIns="0" tIns="0" bIns="0" anchor="t">
+            <a:spAutoFit/>
+          </a:bodyPr>
+          <a:lstStyle/>
+          <a:p>
+            <a:pPr algn="l">
+              <a:lnSpc>
+                <a:spcPct val="120000"/>
+              </a:lnSpc>
+              <a:spcAft>
+                <a:spcPts val="0"/>
+              </a:spcAft>
+            </a:pPr>
+            <a:r>
+              <a:rPr sz="950" b="0" i="0">
+                <a:solidFill>
+                  <a:srgbClr val="9BA8B6"/>
+                </a:solidFill>
+                <a:latin typeface="Segoe UI"/>
+              </a:rPr>
+              <a:t>"Configuration-verified and exercised with</a:t>
+            </a:r>
+          </a:p>
+          <a:p>
+            <a:pPr algn="l">
+              <a:lnSpc>
+                <a:spcPct val="120000"/>
+              </a:lnSpc>
+              <a:spcAft>
+                <a:spcPts val="0"/>
+              </a:spcAft>
+            </a:pPr>
+            <a:r>
+              <a:rPr sz="950" b="0" i="0">
+                <a:solidFill>
+                  <a:srgbClr val="9BA8B6"/>
+                </a:solidFill>
+                <a:latin typeface="Segoe UI"/>
+              </a:rPr>
+              <a:t>the Mock HMD runtime; not yet on hardware"</a:t>
+            </a:r>
+          </a:p>
+        </p:txBody>
+      </p:sp>
+      <p:sp>
+        <p:nvSpPr>
+          <p:cNvPr id="40" name="Rounded Rectangle 39"/>
+          <p:cNvSpPr/>
+          <p:nvPr/>
+        </p:nvSpPr>
+        <p:spPr>
+          <a:xfrm>
+            <a:off x="640080" y="5074920"/>
+            <a:ext cx="10927080" cy="1051560"/>
+          </a:xfrm>
+          <a:prstGeom prst="roundRect">
+            <a:avLst>
+              <a:gd name="adj" fmla="val 2000"/>
+            </a:avLst>
+          </a:prstGeom>
+          <a:solidFill>
+            <a:srgbClr val="2A1B14"/>
+          </a:solidFill>
+          <a:ln w="9525">
+            <a:solidFill>
+              <a:srgbClr val="D93A2B"/>
+            </a:solidFill>
+          </a:ln>
+          <a:effectLst/>
+        </p:spPr>
+        <p:style>
+          <a:lnRef idx="1">
+            <a:schemeClr val="accent1"/>
+          </a:lnRef>
+          <a:fillRef idx="3">
+            <a:schemeClr val="accent1"/>
+          </a:fillRef>
+          <a:effectRef idx="2">
+            <a:schemeClr val="accent1"/>
+          </a:effectRef>
+          <a:fontRef idx="minor">
+            <a:schemeClr val="lt1"/>
+          </a:fontRef>
+        </p:style>
+        <p:txBody>
+          <a:bodyPr rtlCol="0" anchor="ctr"/>
+          <a:lstStyle/>
+          <a:p>
+            <a:pPr algn="ctr"/>
+          </a:p>
+        </p:txBody>
+      </p:sp>
+      <p:sp>
+        <p:nvSpPr>
+          <p:cNvPr id="41" name="TextBox 40"/>
+          <p:cNvSpPr txBox="1"/>
+          <p:nvPr/>
+        </p:nvSpPr>
+        <p:spPr>
+          <a:xfrm>
+            <a:off x="868680" y="5175504"/>
+            <a:ext cx="10424160" cy="320040"/>
+          </a:xfrm>
+          <a:prstGeom prst="rect">
+            <a:avLst/>
+          </a:prstGeom>
+          <a:noFill/>
+        </p:spPr>
+        <p:txBody>
+          <a:bodyPr wrap="square" lIns="0" rIns="0" tIns="0" bIns="0" anchor="t">
+            <a:spAutoFit/>
+          </a:bodyPr>
+          <a:lstStyle/>
+          <a:p>
+            <a:pPr algn="l">
+              <a:lnSpc>
+                <a:spcPct val="110000"/>
+              </a:lnSpc>
+              <a:spcAft>
+                <a:spcPts val="0"/>
+              </a:spcAft>
+            </a:pPr>
+            <a:r>
+              <a:rPr sz="1050" b="1" i="0">
+                <a:solidFill>
+                  <a:srgbClr val="D93A2B"/>
+                </a:solidFill>
+                <a:latin typeface="Segoe UI"/>
+              </a:rPr>
+              <a:t>SAY THIS, NOT MORE</a:t>
+            </a:r>
+          </a:p>
+        </p:txBody>
+      </p:sp>
+      <p:sp>
+        <p:nvSpPr>
+          <p:cNvPr id="42" name="TextBox 41"/>
+          <p:cNvSpPr txBox="1"/>
+          <p:nvPr/>
+        </p:nvSpPr>
+        <p:spPr>
+          <a:xfrm>
+            <a:off x="868680" y="5440680"/>
+            <a:ext cx="10424160" cy="594360"/>
+          </a:xfrm>
+          <a:prstGeom prst="rect">
+            <a:avLst/>
+          </a:prstGeom>
+          <a:noFill/>
+        </p:spPr>
+        <p:txBody>
+          <a:bodyPr wrap="square" lIns="0" rIns="0" tIns="0" bIns="0" anchor="t">
+            <a:spAutoFit/>
+          </a:bodyPr>
+          <a:lstStyle/>
+          <a:p>
+            <a:pPr algn="l">
+              <a:lnSpc>
+                <a:spcPct val="120000"/>
+              </a:lnSpc>
+              <a:spcAft>
+                <a:spcPts val="0"/>
+              </a:spcAft>
+            </a:pPr>
+            <a:r>
+              <a:rPr sz="1100" b="0" i="0">
+                <a:solidFill>
+                  <a:srgbClr val="9BA8B6"/>
+                </a:solidFill>
+                <a:latin typeface="Segoe UI"/>
+              </a:rPr>
+              <a:t>The VR path is implemented and configuration-verified, and was exercised in the Editor with the Mock HMD stereo runtime. It has not been run on a physical headset, and performance on device has not been measured.</a:t>
             </a:r>
           </a:p>
         </p:txBody>
